--- a/TourGPT_ Professional AI Travel Insights.pptx
+++ b/TourGPT_ Professional AI Travel Insights.pptx
@@ -58,6 +58,11 @@
       <p:bold r:id="rId36"/>
       <p:italic r:id="rId37"/>
       <p:boldItalic r:id="rId38"/>
+    </p:embeddedFont>
+    <p:embeddedFont>
+      <p:font typeface="Poppins ExtraBold"/>
+      <p:bold r:id="rId39"/>
+      <p:boldItalic r:id="rId40"/>
     </p:embeddedFont>
   </p:embeddedFontLst>
   <p:defaultTextStyle>
@@ -852,7 +857,7 @@
       </p:grpSpPr>
       <p:sp>
         <p:nvSpPr>
-          <p:cNvPr id="216" name="Google Shape;216;p10:notes"/>
+          <p:cNvPr id="216" name="Google Shape;216;p11:notes"/>
           <p:cNvSpPr txBox="1"/>
           <p:nvPr>
             <p:ph idx="1" type="body"/>
@@ -891,7 +896,7 @@
       </p:sp>
       <p:sp>
         <p:nvSpPr>
-          <p:cNvPr id="217" name="Google Shape;217;p10:notes"/>
+          <p:cNvPr id="217" name="Google Shape;217;p11:notes"/>
           <p:cNvSpPr/>
           <p:nvPr>
             <p:ph idx="2" type="sldImg"/>
@@ -937,7 +942,7 @@
   <p:cSld>
     <p:spTree>
       <p:nvGrpSpPr>
-        <p:cNvPr id="224" name="Shape 224"/>
+        <p:cNvPr id="223" name="Shape 223"/>
         <p:cNvGrpSpPr/>
         <p:nvPr/>
       </p:nvGrpSpPr>
@@ -951,7 +956,7 @@
       </p:grpSpPr>
       <p:sp>
         <p:nvSpPr>
-          <p:cNvPr id="225" name="Google Shape;225;p11:notes"/>
+          <p:cNvPr id="224" name="Google Shape;224;p12:notes"/>
           <p:cNvSpPr txBox="1"/>
           <p:nvPr>
             <p:ph idx="1" type="body"/>
@@ -990,7 +995,7 @@
       </p:sp>
       <p:sp>
         <p:nvSpPr>
-          <p:cNvPr id="226" name="Google Shape;226;p11:notes"/>
+          <p:cNvPr id="225" name="Google Shape;225;p12:notes"/>
           <p:cNvSpPr/>
           <p:nvPr>
             <p:ph idx="2" type="sldImg"/>
@@ -1036,7 +1041,7 @@
   <p:cSld>
     <p:spTree>
       <p:nvGrpSpPr>
-        <p:cNvPr id="232" name="Shape 232"/>
+        <p:cNvPr id="242" name="Shape 242"/>
         <p:cNvGrpSpPr/>
         <p:nvPr/>
       </p:nvGrpSpPr>
@@ -1050,46 +1055,7 @@
       </p:grpSpPr>
       <p:sp>
         <p:nvSpPr>
-          <p:cNvPr id="233" name="Google Shape;233;p12:notes"/>
-          <p:cNvSpPr txBox="1"/>
-          <p:nvPr>
-            <p:ph idx="1" type="body"/>
-          </p:nvPr>
-        </p:nvSpPr>
-        <p:spPr>
-          <a:xfrm>
-            <a:off x="685800" y="4343400"/>
-            <a:ext cx="5486400" cy="4114800"/>
-          </a:xfrm>
-          <a:prstGeom prst="rect">
-            <a:avLst/>
-          </a:prstGeom>
-        </p:spPr>
-        <p:txBody>
-          <a:bodyPr anchorCtr="0" anchor="t" bIns="91425" lIns="91425" spcFirstLastPara="1" rIns="91425" wrap="square" tIns="91425">
-            <a:noAutofit/>
-          </a:bodyPr>
-          <a:lstStyle/>
-          <a:p>
-            <a:pPr indent="0" lvl="0" marL="0" rtl="0" algn="l">
-              <a:spcBef>
-                <a:spcPts val="0"/>
-              </a:spcBef>
-              <a:spcAft>
-                <a:spcPts val="0"/>
-              </a:spcAft>
-              <a:buNone/>
-            </a:pPr>
-            <a:r>
-              <a:t/>
-            </a:r>
-            <a:endParaRPr/>
-          </a:p>
-        </p:txBody>
-      </p:sp>
-      <p:sp>
-        <p:nvSpPr>
-          <p:cNvPr id="234" name="Google Shape;234;p12:notes"/>
+          <p:cNvPr id="243" name="Google Shape;243;g3dbcd7931b8_0_0:notes"/>
           <p:cNvSpPr/>
           <p:nvPr>
             <p:ph idx="2" type="sldImg"/>
@@ -1098,7 +1064,7 @@
         <p:spPr>
           <a:xfrm>
             <a:off x="1143225" y="685800"/>
-            <a:ext cx="4572225" cy="3429000"/>
+            <a:ext cx="4572300" cy="3429000"/>
           </a:xfrm>
           <a:custGeom>
             <a:rect b="b" l="l" r="r" t="t"/>
@@ -1121,6 +1087,45 @@
             </a:pathLst>
           </a:custGeom>
         </p:spPr>
+      </p:sp>
+      <p:sp>
+        <p:nvSpPr>
+          <p:cNvPr id="244" name="Google Shape;244;g3dbcd7931b8_0_0:notes"/>
+          <p:cNvSpPr txBox="1"/>
+          <p:nvPr>
+            <p:ph idx="1" type="body"/>
+          </p:nvPr>
+        </p:nvSpPr>
+        <p:spPr>
+          <a:xfrm>
+            <a:off x="685800" y="4343400"/>
+            <a:ext cx="5486400" cy="4114800"/>
+          </a:xfrm>
+          <a:prstGeom prst="rect">
+            <a:avLst/>
+          </a:prstGeom>
+        </p:spPr>
+        <p:txBody>
+          <a:bodyPr anchorCtr="0" anchor="t" bIns="91425" lIns="91425" spcFirstLastPara="1" rIns="91425" wrap="square" tIns="91425">
+            <a:noAutofit/>
+          </a:bodyPr>
+          <a:lstStyle/>
+          <a:p>
+            <a:pPr indent="0" lvl="0" marL="0" rtl="0" algn="l">
+              <a:spcBef>
+                <a:spcPts val="0"/>
+              </a:spcBef>
+              <a:spcAft>
+                <a:spcPts val="0"/>
+              </a:spcAft>
+              <a:buNone/>
+            </a:pPr>
+            <a:r>
+              <a:t/>
+            </a:r>
+            <a:endParaRPr/>
+          </a:p>
+        </p:txBody>
       </p:sp>
     </p:spTree>
   </p:cSld>
@@ -11803,9 +11808,14 @@
   <p:cSld>
     <p:bg>
       <p:bgPr>
-        <a:solidFill>
-          <a:srgbClr val="0F111A"/>
-        </a:solidFill>
+        <a:blipFill>
+          <a:blip r:embed="rId3">
+            <a:alphaModFix/>
+          </a:blip>
+          <a:stretch>
+            <a:fillRect/>
+          </a:stretch>
+        </a:blipFill>
       </p:bgPr>
     </p:bg>
     <p:spTree>
@@ -11829,7 +11839,7 @@
           <p:nvPr/>
         </p:nvPicPr>
         <p:blipFill rotWithShape="1">
-          <a:blip r:embed="rId3">
+          <a:blip r:embed="rId4">
             <a:alphaModFix/>
           </a:blip>
           <a:srcRect b="0" l="0" r="0" t="0"/>
@@ -11849,254 +11859,9 @@
           </a:ln>
         </p:spPr>
       </p:pic>
-      <p:pic>
-        <p:nvPicPr>
-          <p:cNvPr descr="image.png" id="220" name="Google Shape;220;p22"/>
-          <p:cNvPicPr preferRelativeResize="0"/>
-          <p:nvPr/>
-        </p:nvPicPr>
-        <p:blipFill rotWithShape="1">
-          <a:blip r:embed="rId4">
-            <a:alphaModFix/>
-          </a:blip>
-          <a:srcRect b="0" l="0" r="0" t="0"/>
-          <a:stretch/>
-        </p:blipFill>
-        <p:spPr>
-          <a:xfrm>
-            <a:off x="571500" y="1552575"/>
-            <a:ext cx="11049000" cy="4733925"/>
-          </a:xfrm>
-          <a:prstGeom prst="rect">
-            <a:avLst/>
-          </a:prstGeom>
-          <a:noFill/>
-          <a:ln>
-            <a:noFill/>
-          </a:ln>
-        </p:spPr>
-      </p:pic>
       <p:sp>
         <p:nvSpPr>
-          <p:cNvPr id="221" name="Google Shape;221;p22"/>
-          <p:cNvSpPr txBox="1"/>
-          <p:nvPr/>
-        </p:nvSpPr>
-        <p:spPr>
-          <a:xfrm>
-            <a:off x="571500" y="4514850"/>
-            <a:ext cx="11049000" cy="285750"/>
-          </a:xfrm>
-          <a:prstGeom prst="rect">
-            <a:avLst/>
-          </a:prstGeom>
-          <a:noFill/>
-          <a:ln>
-            <a:noFill/>
-          </a:ln>
-        </p:spPr>
-        <p:txBody>
-          <a:bodyPr anchorCtr="0" anchor="t" bIns="0" lIns="0" spcFirstLastPara="1" rIns="0" wrap="square" tIns="0">
-            <a:spAutoFit/>
-          </a:bodyPr>
-          <a:lstStyle/>
-          <a:p>
-            <a:pPr indent="0" lvl="0" marL="0" marR="0" rtl="0" algn="l">
-              <a:lnSpc>
-                <a:spcPct val="150000"/>
-              </a:lnSpc>
-              <a:spcBef>
-                <a:spcPts val="0"/>
-              </a:spcBef>
-              <a:spcAft>
-                <a:spcPts val="0"/>
-              </a:spcAft>
-              <a:buNone/>
-            </a:pPr>
-            <a:r>
-              <a:rPr b="0" i="1" lang="en-US" sz="1500" u="none" cap="none" strike="noStrike">
-                <a:solidFill>
-                  <a:srgbClr val="94A3B8"/>
-                </a:solidFill>
-                <a:latin typeface="Urbanist"/>
-                <a:ea typeface="Urbanist"/>
-                <a:cs typeface="Urbanist"/>
-                <a:sym typeface="Urbanist"/>
-              </a:rPr>
-              <a:t>"High sentiment matching indicates the model correctly interprets natural language reviews to identify user satisfaction peaks."</a:t>
-            </a:r>
-            <a:endParaRPr/>
-          </a:p>
-        </p:txBody>
-      </p:sp>
-      <p:sp>
-        <p:nvSpPr>
-          <p:cNvPr id="222" name="Google Shape;222;p22"/>
-          <p:cNvSpPr txBox="1"/>
-          <p:nvPr/>
-        </p:nvSpPr>
-        <p:spPr>
-          <a:xfrm>
-            <a:off x="762000" y="571500"/>
-            <a:ext cx="11401425" cy="600075"/>
-          </a:xfrm>
-          <a:prstGeom prst="rect">
-            <a:avLst/>
-          </a:prstGeom>
-          <a:noFill/>
-          <a:ln>
-            <a:noFill/>
-          </a:ln>
-        </p:spPr>
-        <p:txBody>
-          <a:bodyPr anchorCtr="0" anchor="t" bIns="0" lIns="0" spcFirstLastPara="1" rIns="0" wrap="square" tIns="0">
-            <a:spAutoFit/>
-          </a:bodyPr>
-          <a:lstStyle/>
-          <a:p>
-            <a:pPr indent="0" lvl="0" marL="0" marR="0" rtl="0" algn="l">
-              <a:spcBef>
-                <a:spcPts val="0"/>
-              </a:spcBef>
-              <a:spcAft>
-                <a:spcPts val="0"/>
-              </a:spcAft>
-              <a:buNone/>
-            </a:pPr>
-            <a:r>
-              <a:rPr b="1" i="0" lang="en-US" sz="3150" u="none" cap="none" strike="noStrike">
-                <a:solidFill>
-                  <a:srgbClr val="F8FAFC"/>
-                </a:solidFill>
-                <a:latin typeface="Poppins"/>
-                <a:ea typeface="Poppins"/>
-                <a:cs typeface="Poppins"/>
-                <a:sym typeface="Poppins"/>
-              </a:rPr>
-              <a:t>Value Scoring Accuracy</a:t>
-            </a:r>
-            <a:endParaRPr/>
-          </a:p>
-        </p:txBody>
-      </p:sp>
-      <p:sp>
-        <p:nvSpPr>
-          <p:cNvPr id="223" name="Google Shape;223;p22"/>
-          <p:cNvSpPr/>
-          <p:nvPr/>
-        </p:nvSpPr>
-        <p:spPr>
-          <a:xfrm>
-            <a:off x="571500" y="571500"/>
-            <a:ext cx="57150" cy="600075"/>
-          </a:xfrm>
-          <a:prstGeom prst="rect">
-            <a:avLst/>
-          </a:prstGeom>
-          <a:solidFill>
-            <a:srgbClr val="7C3AED"/>
-          </a:solidFill>
-          <a:ln>
-            <a:noFill/>
-          </a:ln>
-        </p:spPr>
-        <p:txBody>
-          <a:bodyPr anchorCtr="0" anchor="ctr" bIns="45700" lIns="91425" spcFirstLastPara="1" rIns="91425" wrap="square" tIns="45700">
-            <a:noAutofit/>
-          </a:bodyPr>
-          <a:lstStyle/>
-          <a:p>
-            <a:pPr indent="0" lvl="0" marL="0" marR="0" rtl="0" algn="ctr">
-              <a:spcBef>
-                <a:spcPts val="0"/>
-              </a:spcBef>
-              <a:spcAft>
-                <a:spcPts val="0"/>
-              </a:spcAft>
-              <a:buNone/>
-            </a:pPr>
-            <a:r>
-              <a:t/>
-            </a:r>
-            <a:endParaRPr b="0" i="0" sz="1800" u="none" cap="none" strike="noStrike">
-              <a:solidFill>
-                <a:schemeClr val="dk1"/>
-              </a:solidFill>
-              <a:latin typeface="Calibri"/>
-              <a:ea typeface="Calibri"/>
-              <a:cs typeface="Calibri"/>
-              <a:sym typeface="Calibri"/>
-            </a:endParaRPr>
-          </a:p>
-        </p:txBody>
-      </p:sp>
-    </p:spTree>
-  </p:cSld>
-  <p:clrMapOvr>
-    <a:masterClrMapping/>
-  </p:clrMapOvr>
-</p:sld>
-</file>
-
-<file path=ppt/slides/slide11.xml><?xml version="1.0" encoding="utf-8"?>
-<p:sld xmlns:a="http://schemas.openxmlformats.org/drawingml/2006/main" xmlns:r="http://schemas.openxmlformats.org/officeDocument/2006/relationships" xmlns:mc="http://schemas.openxmlformats.org/markup-compatibility/2006" xmlns:mv="urn:schemas-microsoft-com:mac:vml" xmlns:p="http://schemas.openxmlformats.org/presentationml/2006/main" xmlns:c="http://schemas.openxmlformats.org/drawingml/2006/chart" xmlns:dgm="http://schemas.openxmlformats.org/drawingml/2006/diagram" xmlns:o="urn:schemas-microsoft-com:office:office" xmlns:v="urn:schemas-microsoft-com:vml" xmlns:pvml="urn:schemas-microsoft-com:office:powerpoint" xmlns:com="http://schemas.openxmlformats.org/drawingml/2006/compatibility" xmlns:p14="http://schemas.microsoft.com/office/powerpoint/2010/main" xmlns:p15="http://schemas.microsoft.com/office/powerpoint/2012/main" xmlns:ahyp="http://schemas.microsoft.com/office/drawing/2018/hyperlinkcolor">
-  <p:cSld>
-    <p:bg>
-      <p:bgPr>
-        <a:blipFill>
-          <a:blip r:embed="rId3">
-            <a:alphaModFix/>
-          </a:blip>
-          <a:stretch>
-            <a:fillRect/>
-          </a:stretch>
-        </a:blipFill>
-      </p:bgPr>
-    </p:bg>
-    <p:spTree>
-      <p:nvGrpSpPr>
-        <p:cNvPr id="227" name="Shape 227"/>
-        <p:cNvGrpSpPr/>
-        <p:nvPr/>
-      </p:nvGrpSpPr>
-      <p:grpSpPr>
-        <a:xfrm>
-          <a:off x="0" y="0"/>
-          <a:ext cx="0" cy="0"/>
-          <a:chOff x="0" y="0"/>
-          <a:chExt cx="0" cy="0"/>
-        </a:xfrm>
-      </p:grpSpPr>
-      <p:pic>
-        <p:nvPicPr>
-          <p:cNvPr descr="image.png" id="228" name="Google Shape;228;p23"/>
-          <p:cNvPicPr preferRelativeResize="0"/>
-          <p:nvPr/>
-        </p:nvPicPr>
-        <p:blipFill rotWithShape="1">
-          <a:blip r:embed="rId4">
-            <a:alphaModFix/>
-          </a:blip>
-          <a:srcRect b="0" l="0" r="0" t="0"/>
-          <a:stretch/>
-        </p:blipFill>
-        <p:spPr>
-          <a:xfrm>
-            <a:off x="0" y="0"/>
-            <a:ext cx="12192000" cy="6858000"/>
-          </a:xfrm>
-          <a:prstGeom prst="rect">
-            <a:avLst/>
-          </a:prstGeom>
-          <a:noFill/>
-          <a:ln>
-            <a:noFill/>
-          </a:ln>
-        </p:spPr>
-      </p:pic>
-      <p:sp>
-        <p:nvSpPr>
-          <p:cNvPr id="229" name="Google Shape;229;p23"/>
+          <p:cNvPr id="220" name="Google Shape;220;p22"/>
           <p:cNvSpPr txBox="1"/>
           <p:nvPr/>
         </p:nvSpPr>
@@ -12146,7 +11911,7 @@
       </p:sp>
       <p:sp>
         <p:nvSpPr>
-          <p:cNvPr id="230" name="Google Shape;230;p23"/>
+          <p:cNvPr id="221" name="Google Shape;221;p22"/>
           <p:cNvSpPr/>
           <p:nvPr/>
         </p:nvSpPr>
@@ -12199,7 +11964,7 @@
       </p:sp>
       <p:sp>
         <p:nvSpPr>
-          <p:cNvPr id="231" name="Google Shape;231;p23"/>
+          <p:cNvPr id="222" name="Google Shape;222;p22"/>
           <p:cNvSpPr txBox="1"/>
           <p:nvPr/>
         </p:nvSpPr>
@@ -12258,7 +12023,7 @@
 </p:sld>
 </file>
 
-<file path=ppt/slides/slide12.xml><?xml version="1.0" encoding="utf-8"?>
+<file path=ppt/slides/slide11.xml><?xml version="1.0" encoding="utf-8"?>
 <p:sld xmlns:a="http://schemas.openxmlformats.org/drawingml/2006/main" xmlns:r="http://schemas.openxmlformats.org/officeDocument/2006/relationships" xmlns:mc="http://schemas.openxmlformats.org/markup-compatibility/2006" xmlns:mv="urn:schemas-microsoft-com:mac:vml" xmlns:p="http://schemas.openxmlformats.org/presentationml/2006/main" xmlns:c="http://schemas.openxmlformats.org/drawingml/2006/chart" xmlns:dgm="http://schemas.openxmlformats.org/drawingml/2006/diagram" xmlns:o="urn:schemas-microsoft-com:office:office" xmlns:v="urn:schemas-microsoft-com:vml" xmlns:pvml="urn:schemas-microsoft-com:office:powerpoint" xmlns:com="http://schemas.openxmlformats.org/drawingml/2006/compatibility" xmlns:p14="http://schemas.microsoft.com/office/powerpoint/2010/main" xmlns:p15="http://schemas.microsoft.com/office/powerpoint/2012/main" xmlns:ahyp="http://schemas.microsoft.com/office/drawing/2018/hyperlinkcolor">
   <p:cSld>
     <p:bg>
@@ -12270,7 +12035,7 @@
     </p:bg>
     <p:spTree>
       <p:nvGrpSpPr>
-        <p:cNvPr id="235" name="Shape 235"/>
+        <p:cNvPr id="226" name="Shape 226"/>
         <p:cNvGrpSpPr/>
         <p:nvPr/>
       </p:nvGrpSpPr>
@@ -12284,7 +12049,7 @@
       </p:grpSpPr>
       <p:pic>
         <p:nvPicPr>
-          <p:cNvPr descr="image.png" id="236" name="Google Shape;236;p24"/>
+          <p:cNvPr descr="image.png" id="227" name="Google Shape;227;p23"/>
           <p:cNvPicPr preferRelativeResize="0"/>
           <p:nvPr/>
         </p:nvPicPr>
@@ -12297,7 +12062,7 @@
         </p:blipFill>
         <p:spPr>
           <a:xfrm>
-            <a:off x="0" y="0"/>
+            <a:off x="0" y="45800"/>
             <a:ext cx="12192000" cy="6858000"/>
           </a:xfrm>
           <a:prstGeom prst="rect">
@@ -12311,7 +12076,7 @@
       </p:pic>
       <p:pic>
         <p:nvPicPr>
-          <p:cNvPr descr="image.png" id="237" name="Google Shape;237;p24"/>
+          <p:cNvPr descr="image.png" id="228" name="Google Shape;228;p23"/>
           <p:cNvPicPr preferRelativeResize="0"/>
           <p:nvPr/>
         </p:nvPicPr>
@@ -12338,7 +12103,7 @@
       </p:pic>
       <p:pic>
         <p:nvPicPr>
-          <p:cNvPr descr="image.png" id="238" name="Google Shape;238;p24"/>
+          <p:cNvPr descr="image.png" id="229" name="Google Shape;229;p23"/>
           <p:cNvPicPr preferRelativeResize="0"/>
           <p:nvPr/>
         </p:nvPicPr>
@@ -12365,7 +12130,7 @@
       </p:pic>
       <p:pic>
         <p:nvPicPr>
-          <p:cNvPr descr="image.png" id="239" name="Google Shape;239;p24"/>
+          <p:cNvPr descr="image.png" id="230" name="Google Shape;230;p23"/>
           <p:cNvPicPr preferRelativeResize="0"/>
           <p:nvPr/>
         </p:nvPicPr>
@@ -12392,7 +12157,7 @@
       </p:pic>
       <p:pic>
         <p:nvPicPr>
-          <p:cNvPr descr="image.png" id="240" name="Google Shape;240;p24"/>
+          <p:cNvPr descr="image.png" id="231" name="Google Shape;231;p23"/>
           <p:cNvPicPr preferRelativeResize="0"/>
           <p:nvPr/>
         </p:nvPicPr>
@@ -12419,7 +12184,7 @@
       </p:pic>
       <p:sp>
         <p:nvSpPr>
-          <p:cNvPr id="241" name="Google Shape;241;p24"/>
+          <p:cNvPr id="232" name="Google Shape;232;p23"/>
           <p:cNvSpPr txBox="1"/>
           <p:nvPr/>
         </p:nvSpPr>
@@ -12469,7 +12234,7 @@
       </p:sp>
       <p:sp>
         <p:nvSpPr>
-          <p:cNvPr id="242" name="Google Shape;242;p24"/>
+          <p:cNvPr id="233" name="Google Shape;233;p23"/>
           <p:cNvSpPr txBox="1"/>
           <p:nvPr/>
         </p:nvSpPr>
@@ -12522,7 +12287,7 @@
       </p:sp>
       <p:sp>
         <p:nvSpPr>
-          <p:cNvPr id="243" name="Google Shape;243;p24"/>
+          <p:cNvPr id="234" name="Google Shape;234;p23"/>
           <p:cNvSpPr txBox="1"/>
           <p:nvPr/>
         </p:nvSpPr>
@@ -12575,7 +12340,7 @@
       </p:sp>
       <p:sp>
         <p:nvSpPr>
-          <p:cNvPr id="244" name="Google Shape;244;p24"/>
+          <p:cNvPr id="235" name="Google Shape;235;p23"/>
           <p:cNvSpPr txBox="1"/>
           <p:nvPr/>
         </p:nvSpPr>
@@ -12628,7 +12393,7 @@
       </p:sp>
       <p:sp>
         <p:nvSpPr>
-          <p:cNvPr id="245" name="Google Shape;245;p24"/>
+          <p:cNvPr id="236" name="Google Shape;236;p23"/>
           <p:cNvSpPr txBox="1"/>
           <p:nvPr/>
         </p:nvSpPr>
@@ -12681,7 +12446,7 @@
       </p:sp>
       <p:sp>
         <p:nvSpPr>
-          <p:cNvPr id="246" name="Google Shape;246;p24"/>
+          <p:cNvPr id="237" name="Google Shape;237;p23"/>
           <p:cNvSpPr txBox="1"/>
           <p:nvPr/>
         </p:nvSpPr>
@@ -12734,7 +12499,7 @@
       </p:sp>
       <p:sp>
         <p:nvSpPr>
-          <p:cNvPr id="247" name="Google Shape;247;p24"/>
+          <p:cNvPr id="238" name="Google Shape;238;p23"/>
           <p:cNvSpPr txBox="1"/>
           <p:nvPr/>
         </p:nvSpPr>
@@ -12787,7 +12552,7 @@
       </p:sp>
       <p:sp>
         <p:nvSpPr>
-          <p:cNvPr id="248" name="Google Shape;248;p24"/>
+          <p:cNvPr id="239" name="Google Shape;239;p23"/>
           <p:cNvSpPr txBox="1"/>
           <p:nvPr/>
         </p:nvSpPr>
@@ -12840,7 +12605,7 @@
       </p:sp>
       <p:sp>
         <p:nvSpPr>
-          <p:cNvPr id="249" name="Google Shape;249;p24"/>
+          <p:cNvPr id="240" name="Google Shape;240;p23"/>
           <p:cNvSpPr txBox="1"/>
           <p:nvPr/>
         </p:nvSpPr>
@@ -12890,7 +12655,7 @@
       </p:sp>
       <p:sp>
         <p:nvSpPr>
-          <p:cNvPr id="250" name="Google Shape;250;p24"/>
+          <p:cNvPr id="241" name="Google Shape;241;p23"/>
           <p:cNvSpPr/>
           <p:nvPr/>
         </p:nvSpPr>
@@ -12935,6 +12700,116 @@
               <a:ea typeface="Calibri"/>
               <a:cs typeface="Calibri"/>
               <a:sym typeface="Calibri"/>
+            </a:endParaRPr>
+          </a:p>
+        </p:txBody>
+      </p:sp>
+    </p:spTree>
+  </p:cSld>
+  <p:clrMapOvr>
+    <a:masterClrMapping/>
+  </p:clrMapOvr>
+</p:sld>
+</file>
+
+<file path=ppt/slides/slide12.xml><?xml version="1.0" encoding="utf-8"?>
+<p:sld xmlns:a="http://schemas.openxmlformats.org/drawingml/2006/main" xmlns:r="http://schemas.openxmlformats.org/officeDocument/2006/relationships" xmlns:mc="http://schemas.openxmlformats.org/markup-compatibility/2006" xmlns:mv="urn:schemas-microsoft-com:mac:vml" xmlns:p="http://schemas.openxmlformats.org/presentationml/2006/main" xmlns:c="http://schemas.openxmlformats.org/drawingml/2006/chart" xmlns:dgm="http://schemas.openxmlformats.org/drawingml/2006/diagram" xmlns:o="urn:schemas-microsoft-com:office:office" xmlns:v="urn:schemas-microsoft-com:vml" xmlns:pvml="urn:schemas-microsoft-com:office:powerpoint" xmlns:com="http://schemas.openxmlformats.org/drawingml/2006/compatibility" xmlns:p14="http://schemas.microsoft.com/office/powerpoint/2010/main" xmlns:p15="http://schemas.microsoft.com/office/powerpoint/2012/main" xmlns:ahyp="http://schemas.microsoft.com/office/drawing/2018/hyperlinkcolor">
+  <p:cSld>
+    <p:spTree>
+      <p:nvGrpSpPr>
+        <p:cNvPr id="245" name="Shape 245"/>
+        <p:cNvGrpSpPr/>
+        <p:nvPr/>
+      </p:nvGrpSpPr>
+      <p:grpSpPr>
+        <a:xfrm>
+          <a:off x="0" y="0"/>
+          <a:ext cx="0" cy="0"/>
+          <a:chOff x="0" y="0"/>
+          <a:chExt cx="0" cy="0"/>
+        </a:xfrm>
+      </p:grpSpPr>
+      <p:pic>
+        <p:nvPicPr>
+          <p:cNvPr descr="image.png" id="246" name="Google Shape;246;p24"/>
+          <p:cNvPicPr preferRelativeResize="0"/>
+          <p:nvPr/>
+        </p:nvPicPr>
+        <p:blipFill rotWithShape="1">
+          <a:blip r:embed="rId3">
+            <a:alphaModFix/>
+          </a:blip>
+          <a:srcRect b="0" l="0" r="0" t="0"/>
+          <a:stretch/>
+        </p:blipFill>
+        <p:spPr>
+          <a:xfrm>
+            <a:off x="0" y="45800"/>
+            <a:ext cx="12192000" cy="6858000"/>
+          </a:xfrm>
+          <a:prstGeom prst="rect">
+            <a:avLst/>
+          </a:prstGeom>
+          <a:noFill/>
+          <a:ln>
+            <a:noFill/>
+          </a:ln>
+        </p:spPr>
+      </p:pic>
+      <p:sp>
+        <p:nvSpPr>
+          <p:cNvPr id="247" name="Google Shape;247;p24"/>
+          <p:cNvSpPr txBox="1"/>
+          <p:nvPr/>
+        </p:nvSpPr>
+        <p:spPr>
+          <a:xfrm>
+            <a:off x="3952800" y="2617500"/>
+            <a:ext cx="4286400" cy="1623000"/>
+          </a:xfrm>
+          <a:prstGeom prst="rect">
+            <a:avLst/>
+          </a:prstGeom>
+          <a:noFill/>
+          <a:ln>
+            <a:noFill/>
+          </a:ln>
+        </p:spPr>
+        <p:txBody>
+          <a:bodyPr anchorCtr="0" anchor="ctr" bIns="91425" lIns="91425" spcFirstLastPara="1" rIns="91425" wrap="square" tIns="91425">
+            <a:noAutofit/>
+          </a:bodyPr>
+          <a:lstStyle/>
+          <a:p>
+            <a:pPr indent="0" lvl="0" marL="0" rtl="0" algn="ctr">
+              <a:spcBef>
+                <a:spcPts val="0"/>
+              </a:spcBef>
+              <a:spcAft>
+                <a:spcPts val="0"/>
+              </a:spcAft>
+              <a:buNone/>
+            </a:pPr>
+            <a:r>
+              <a:rPr lang="en-US" sz="7200">
+                <a:solidFill>
+                  <a:schemeClr val="lt1"/>
+                </a:solidFill>
+                <a:latin typeface="Poppins ExtraBold"/>
+                <a:ea typeface="Poppins ExtraBold"/>
+                <a:cs typeface="Poppins ExtraBold"/>
+                <a:sym typeface="Poppins ExtraBold"/>
+              </a:rPr>
+              <a:t>Q&amp;A</a:t>
+            </a:r>
+            <a:endParaRPr sz="7200">
+              <a:solidFill>
+                <a:schemeClr val="lt1"/>
+              </a:solidFill>
+              <a:latin typeface="Poppins ExtraBold"/>
+              <a:ea typeface="Poppins ExtraBold"/>
+              <a:cs typeface="Poppins ExtraBold"/>
+              <a:sym typeface="Poppins ExtraBold"/>
             </a:endParaRPr>
           </a:p>
         </p:txBody>
@@ -17310,7 +17185,7 @@
             <a:tbl>
               <a:tblPr bandRow="1" firstRow="1">
                 <a:noFill/>
-                <a:tableStyleId>{1EC57AF7-E65F-4B1F-B393-4A3A100FE12D}</a:tableStyleId>
+                <a:tableStyleId>{44808F9B-54B5-4805-B347-0F1B3F1C9F69}</a:tableStyleId>
               </a:tblPr>
               <a:tblGrid>
                 <a:gridCol w="2786050"/>
@@ -17719,7 +17594,7 @@
                         <a:buNone/>
                       </a:pPr>
                       <a:r>
-                        <a:rPr b="0" i="0" lang="en-US" sz="1300" u="none" cap="none" strike="noStrike">
+                        <a:rPr lang="en-US" sz="1300">
                           <a:solidFill>
                             <a:srgbClr val="F8FAFC"/>
                           </a:solidFill>
@@ -17728,7 +17603,7 @@
                           <a:cs typeface="Urbanist"/>
                           <a:sym typeface="Urbanist"/>
                         </a:rPr>
-                        <a:t>Limited</a:t>
+                        <a:t>Unclear</a:t>
                       </a:r>
                       <a:endParaRPr sz="1500"/>
                     </a:p>
@@ -18036,7 +17911,7 @@
                         <a:buNone/>
                       </a:pPr>
                       <a:r>
-                        <a:rPr b="0" i="0" lang="en-US" sz="1300" u="none" cap="none" strike="noStrike">
+                        <a:rPr lang="en-US" sz="1300">
                           <a:solidFill>
                             <a:srgbClr val="F8FAFC"/>
                           </a:solidFill>
@@ -18045,7 +17920,7 @@
                           <a:cs typeface="Urbanist"/>
                           <a:sym typeface="Urbanist"/>
                         </a:rPr>
-                        <a:t>Yes (Hidden Costs)</a:t>
+                        <a:t>Subscription</a:t>
                       </a:r>
                       <a:endParaRPr sz="1500"/>
                     </a:p>
@@ -18353,7 +18228,7 @@
                         <a:buNone/>
                       </a:pPr>
                       <a:r>
-                        <a:rPr b="1" i="0" lang="en-US" sz="1300" u="none" cap="none" strike="noStrike">
+                        <a:rPr b="1" lang="en-US" sz="1300">
                           <a:solidFill>
                             <a:srgbClr val="F8FAFC"/>
                           </a:solidFill>
@@ -18362,7 +18237,7 @@
                           <a:cs typeface="Urbanist"/>
                           <a:sym typeface="Urbanist"/>
                         </a:rPr>
-                        <a:t>Direct Viator Link</a:t>
+                        <a:t>FREE</a:t>
                       </a:r>
                       <a:endParaRPr sz="1500"/>
                     </a:p>
@@ -18441,7 +18316,7 @@
                           <a:cs typeface="Urbanist"/>
                           <a:sym typeface="Urbanist"/>
                         </a:rPr>
-                        <a:t>Async LLM Scoring</a:t>
+                        <a:t>Async LLM Scoring/Scam Detection</a:t>
                       </a:r>
                       <a:endParaRPr sz="1500"/>
                     </a:p>
